--- a/Fonctionnement de mon compte CAF de A à Z/Mon_compte_CAF_pas_a_pas_1.pptx
+++ b/Fonctionnement de mon compte CAF de A à Z/Mon_compte_CAF_pas_a_pas_1.pptx
@@ -3373,6 +3373,46 @@
           </a:p>
         </p:txBody>
       </p:sp>
+      <p:sp>
+        <p:nvSpPr>
+          <p:cNvPr id="2" name="ZoneTexte 1">
+            <a:extLst>
+              <a:ext uri="{FF2B5EF4-FFF2-40B4-BE49-F238E27FC236}">
+                <a16:creationId xmlns:a16="http://schemas.microsoft.com/office/drawing/2014/main" id="{07263058-C33D-B624-7E85-D574E3BA0030}"/>
+              </a:ext>
+            </a:extLst>
+          </p:cNvPr>
+          <p:cNvSpPr txBox="1"/>
+          <p:nvPr/>
+        </p:nvSpPr>
+        <p:spPr>
+          <a:xfrm>
+            <a:off x="0" y="4864100"/>
+            <a:ext cx="9144000" cy="230832"/>
+          </a:xfrm>
+          <a:prstGeom prst="rect">
+            <a:avLst/>
+          </a:prstGeom>
+          <a:noFill/>
+        </p:spPr>
+        <p:txBody>
+          <a:bodyPr vert="horz" rtlCol="0">
+            <a:spAutoFit/>
+          </a:bodyPr>
+          <a:lstStyle/>
+          <a:p>
+            <a:pPr algn="ctr"/>
+            <a:r>
+              <a:rPr lang="fr-FR" sz="900">
+                <a:solidFill>
+                  <a:srgbClr val="B4B4B4"/>
+                </a:solidFill>
+              </a:rPr>
+              <a:t>(c) titi_23 - mediateur-numerique.github.io - Reproduction interdite sans autorisation</a:t>
+            </a:r>
+          </a:p>
+        </p:txBody>
+      </p:sp>
     </p:spTree>
   </p:cSld>
   <p:clrMapOvr>
@@ -4714,6 +4754,46 @@
           </a:p>
         </p:txBody>
       </p:sp>
+      <p:sp>
+        <p:nvSpPr>
+          <p:cNvPr id="35" name="ZoneTexte 34">
+            <a:extLst>
+              <a:ext uri="{FF2B5EF4-FFF2-40B4-BE49-F238E27FC236}">
+                <a16:creationId xmlns:a16="http://schemas.microsoft.com/office/drawing/2014/main" id="{2492D6EB-C318-594F-FDC6-3E643F2C06F0}"/>
+              </a:ext>
+            </a:extLst>
+          </p:cNvPr>
+          <p:cNvSpPr txBox="1"/>
+          <p:nvPr/>
+        </p:nvSpPr>
+        <p:spPr>
+          <a:xfrm>
+            <a:off x="0" y="4864100"/>
+            <a:ext cx="9144000" cy="230832"/>
+          </a:xfrm>
+          <a:prstGeom prst="rect">
+            <a:avLst/>
+          </a:prstGeom>
+          <a:noFill/>
+        </p:spPr>
+        <p:txBody>
+          <a:bodyPr vert="horz" rtlCol="0">
+            <a:spAutoFit/>
+          </a:bodyPr>
+          <a:lstStyle/>
+          <a:p>
+            <a:pPr algn="ctr"/>
+            <a:r>
+              <a:rPr lang="fr-FR" sz="900">
+                <a:solidFill>
+                  <a:srgbClr val="B4B4B4"/>
+                </a:solidFill>
+              </a:rPr>
+              <a:t>(c) titi_23 - mediateur-numerique.github.io - Reproduction interdite sans autorisation</a:t>
+            </a:r>
+          </a:p>
+        </p:txBody>
+      </p:sp>
     </p:spTree>
   </p:cSld>
   <p:clrMapOvr>
@@ -6000,6 +6080,46 @@
           </a:p>
         </p:txBody>
       </p:sp>
+      <p:sp>
+        <p:nvSpPr>
+          <p:cNvPr id="35" name="ZoneTexte 34">
+            <a:extLst>
+              <a:ext uri="{FF2B5EF4-FFF2-40B4-BE49-F238E27FC236}">
+                <a16:creationId xmlns:a16="http://schemas.microsoft.com/office/drawing/2014/main" id="{7D37AE5F-1BCF-97F2-8CA0-ACD501C47653}"/>
+              </a:ext>
+            </a:extLst>
+          </p:cNvPr>
+          <p:cNvSpPr txBox="1"/>
+          <p:nvPr/>
+        </p:nvSpPr>
+        <p:spPr>
+          <a:xfrm>
+            <a:off x="0" y="4864100"/>
+            <a:ext cx="9144000" cy="230832"/>
+          </a:xfrm>
+          <a:prstGeom prst="rect">
+            <a:avLst/>
+          </a:prstGeom>
+          <a:noFill/>
+        </p:spPr>
+        <p:txBody>
+          <a:bodyPr vert="horz" rtlCol="0">
+            <a:spAutoFit/>
+          </a:bodyPr>
+          <a:lstStyle/>
+          <a:p>
+            <a:pPr algn="ctr"/>
+            <a:r>
+              <a:rPr lang="fr-FR" sz="900">
+                <a:solidFill>
+                  <a:srgbClr val="B4B4B4"/>
+                </a:solidFill>
+              </a:rPr>
+              <a:t>(c) titi_23 - mediateur-numerique.github.io - Reproduction interdite sans autorisation</a:t>
+            </a:r>
+          </a:p>
+        </p:txBody>
+      </p:sp>
     </p:spTree>
   </p:cSld>
   <p:clrMapOvr>
@@ -7534,6 +7654,46 @@
           </a:p>
         </p:txBody>
       </p:sp>
+      <p:sp>
+        <p:nvSpPr>
+          <p:cNvPr id="39" name="ZoneTexte 38">
+            <a:extLst>
+              <a:ext uri="{FF2B5EF4-FFF2-40B4-BE49-F238E27FC236}">
+                <a16:creationId xmlns:a16="http://schemas.microsoft.com/office/drawing/2014/main" id="{513C3518-F6EB-E02B-2498-B6562884547E}"/>
+              </a:ext>
+            </a:extLst>
+          </p:cNvPr>
+          <p:cNvSpPr txBox="1"/>
+          <p:nvPr/>
+        </p:nvSpPr>
+        <p:spPr>
+          <a:xfrm>
+            <a:off x="0" y="4864100"/>
+            <a:ext cx="9144000" cy="230832"/>
+          </a:xfrm>
+          <a:prstGeom prst="rect">
+            <a:avLst/>
+          </a:prstGeom>
+          <a:noFill/>
+        </p:spPr>
+        <p:txBody>
+          <a:bodyPr vert="horz" rtlCol="0">
+            <a:spAutoFit/>
+          </a:bodyPr>
+          <a:lstStyle/>
+          <a:p>
+            <a:pPr algn="ctr"/>
+            <a:r>
+              <a:rPr lang="fr-FR" sz="900">
+                <a:solidFill>
+                  <a:srgbClr val="B4B4B4"/>
+                </a:solidFill>
+              </a:rPr>
+              <a:t>(c) titi_23 - mediateur-numerique.github.io - Reproduction interdite sans autorisation</a:t>
+            </a:r>
+          </a:p>
+        </p:txBody>
+      </p:sp>
     </p:spTree>
   </p:cSld>
   <p:clrMapOvr>
@@ -8534,6 +8694,46 @@
           </a:p>
         </p:txBody>
       </p:sp>
+      <p:sp>
+        <p:nvSpPr>
+          <p:cNvPr id="31" name="ZoneTexte 30">
+            <a:extLst>
+              <a:ext uri="{FF2B5EF4-FFF2-40B4-BE49-F238E27FC236}">
+                <a16:creationId xmlns:a16="http://schemas.microsoft.com/office/drawing/2014/main" id="{FA959216-694D-3129-221B-F3AA4FB11999}"/>
+              </a:ext>
+            </a:extLst>
+          </p:cNvPr>
+          <p:cNvSpPr txBox="1"/>
+          <p:nvPr/>
+        </p:nvSpPr>
+        <p:spPr>
+          <a:xfrm>
+            <a:off x="0" y="4864100"/>
+            <a:ext cx="9144000" cy="230832"/>
+          </a:xfrm>
+          <a:prstGeom prst="rect">
+            <a:avLst/>
+          </a:prstGeom>
+          <a:noFill/>
+        </p:spPr>
+        <p:txBody>
+          <a:bodyPr vert="horz" rtlCol="0">
+            <a:spAutoFit/>
+          </a:bodyPr>
+          <a:lstStyle/>
+          <a:p>
+            <a:pPr algn="ctr"/>
+            <a:r>
+              <a:rPr lang="fr-FR" sz="900">
+                <a:solidFill>
+                  <a:srgbClr val="B4B4B4"/>
+                </a:solidFill>
+              </a:rPr>
+              <a:t>(c) titi_23 - mediateur-numerique.github.io - Reproduction interdite sans autorisation</a:t>
+            </a:r>
+          </a:p>
+        </p:txBody>
+      </p:sp>
     </p:spTree>
   </p:cSld>
   <p:clrMapOvr>
@@ -10002,6 +10202,46 @@
           </a:p>
         </p:txBody>
       </p:sp>
+      <p:sp>
+        <p:nvSpPr>
+          <p:cNvPr id="39" name="ZoneTexte 38">
+            <a:extLst>
+              <a:ext uri="{FF2B5EF4-FFF2-40B4-BE49-F238E27FC236}">
+                <a16:creationId xmlns:a16="http://schemas.microsoft.com/office/drawing/2014/main" id="{8F10074B-1B0D-4CFB-7B14-B9BB7AE289A5}"/>
+              </a:ext>
+            </a:extLst>
+          </p:cNvPr>
+          <p:cNvSpPr txBox="1"/>
+          <p:nvPr/>
+        </p:nvSpPr>
+        <p:spPr>
+          <a:xfrm>
+            <a:off x="0" y="4864100"/>
+            <a:ext cx="9144000" cy="230832"/>
+          </a:xfrm>
+          <a:prstGeom prst="rect">
+            <a:avLst/>
+          </a:prstGeom>
+          <a:noFill/>
+        </p:spPr>
+        <p:txBody>
+          <a:bodyPr vert="horz" rtlCol="0">
+            <a:spAutoFit/>
+          </a:bodyPr>
+          <a:lstStyle/>
+          <a:p>
+            <a:pPr algn="ctr"/>
+            <a:r>
+              <a:rPr lang="fr-FR" sz="900">
+                <a:solidFill>
+                  <a:srgbClr val="B4B4B4"/>
+                </a:solidFill>
+              </a:rPr>
+              <a:t>(c) titi_23 - mediateur-numerique.github.io - Reproduction interdite sans autorisation</a:t>
+            </a:r>
+          </a:p>
+        </p:txBody>
+      </p:sp>
     </p:spTree>
   </p:cSld>
   <p:clrMapOvr>
@@ -11483,6 +11723,46 @@
           </a:p>
         </p:txBody>
       </p:sp>
+      <p:sp>
+        <p:nvSpPr>
+          <p:cNvPr id="43" name="ZoneTexte 42">
+            <a:extLst>
+              <a:ext uri="{FF2B5EF4-FFF2-40B4-BE49-F238E27FC236}">
+                <a16:creationId xmlns:a16="http://schemas.microsoft.com/office/drawing/2014/main" id="{A21858CA-7EBB-BA6A-4821-EEA0C930345A}"/>
+              </a:ext>
+            </a:extLst>
+          </p:cNvPr>
+          <p:cNvSpPr txBox="1"/>
+          <p:nvPr/>
+        </p:nvSpPr>
+        <p:spPr>
+          <a:xfrm>
+            <a:off x="0" y="4864100"/>
+            <a:ext cx="9144000" cy="230832"/>
+          </a:xfrm>
+          <a:prstGeom prst="rect">
+            <a:avLst/>
+          </a:prstGeom>
+          <a:noFill/>
+        </p:spPr>
+        <p:txBody>
+          <a:bodyPr vert="horz" rtlCol="0">
+            <a:spAutoFit/>
+          </a:bodyPr>
+          <a:lstStyle/>
+          <a:p>
+            <a:pPr algn="ctr"/>
+            <a:r>
+              <a:rPr lang="fr-FR" sz="900">
+                <a:solidFill>
+                  <a:srgbClr val="B4B4B4"/>
+                </a:solidFill>
+              </a:rPr>
+              <a:t>(c) titi_23 - mediateur-numerique.github.io - Reproduction interdite sans autorisation</a:t>
+            </a:r>
+          </a:p>
+        </p:txBody>
+      </p:sp>
     </p:spTree>
   </p:cSld>
   <p:clrMapOvr>
@@ -12995,6 +13275,46 @@
           </a:p>
         </p:txBody>
       </p:sp>
+      <p:sp>
+        <p:nvSpPr>
+          <p:cNvPr id="49" name="ZoneTexte 48">
+            <a:extLst>
+              <a:ext uri="{FF2B5EF4-FFF2-40B4-BE49-F238E27FC236}">
+                <a16:creationId xmlns:a16="http://schemas.microsoft.com/office/drawing/2014/main" id="{0912B766-E9BF-2465-C2C4-A9FFAF1BF80B}"/>
+              </a:ext>
+            </a:extLst>
+          </p:cNvPr>
+          <p:cNvSpPr txBox="1"/>
+          <p:nvPr/>
+        </p:nvSpPr>
+        <p:spPr>
+          <a:xfrm>
+            <a:off x="0" y="4864100"/>
+            <a:ext cx="9144000" cy="230832"/>
+          </a:xfrm>
+          <a:prstGeom prst="rect">
+            <a:avLst/>
+          </a:prstGeom>
+          <a:noFill/>
+        </p:spPr>
+        <p:txBody>
+          <a:bodyPr vert="horz" rtlCol="0">
+            <a:spAutoFit/>
+          </a:bodyPr>
+          <a:lstStyle/>
+          <a:p>
+            <a:pPr algn="ctr"/>
+            <a:r>
+              <a:rPr lang="fr-FR" sz="900">
+                <a:solidFill>
+                  <a:srgbClr val="B4B4B4"/>
+                </a:solidFill>
+              </a:rPr>
+              <a:t>(c) titi_23 - mediateur-numerique.github.io - Reproduction interdite sans autorisation</a:t>
+            </a:r>
+          </a:p>
+        </p:txBody>
+      </p:sp>
     </p:spTree>
   </p:cSld>
   <p:clrMapOvr>
@@ -14129,6 +14449,46 @@
           </a:p>
         </p:txBody>
       </p:sp>
+      <p:sp>
+        <p:nvSpPr>
+          <p:cNvPr id="35" name="ZoneTexte 34">
+            <a:extLst>
+              <a:ext uri="{FF2B5EF4-FFF2-40B4-BE49-F238E27FC236}">
+                <a16:creationId xmlns:a16="http://schemas.microsoft.com/office/drawing/2014/main" id="{66E5DC50-35F5-B87B-19CB-E1C742079B8F}"/>
+              </a:ext>
+            </a:extLst>
+          </p:cNvPr>
+          <p:cNvSpPr txBox="1"/>
+          <p:nvPr/>
+        </p:nvSpPr>
+        <p:spPr>
+          <a:xfrm>
+            <a:off x="0" y="4864100"/>
+            <a:ext cx="9144000" cy="230832"/>
+          </a:xfrm>
+          <a:prstGeom prst="rect">
+            <a:avLst/>
+          </a:prstGeom>
+          <a:noFill/>
+        </p:spPr>
+        <p:txBody>
+          <a:bodyPr vert="horz" rtlCol="0">
+            <a:spAutoFit/>
+          </a:bodyPr>
+          <a:lstStyle/>
+          <a:p>
+            <a:pPr algn="ctr"/>
+            <a:r>
+              <a:rPr lang="fr-FR" sz="900">
+                <a:solidFill>
+                  <a:srgbClr val="B4B4B4"/>
+                </a:solidFill>
+              </a:rPr>
+              <a:t>(c) titi_23 - mediateur-numerique.github.io - Reproduction interdite sans autorisation</a:t>
+            </a:r>
+          </a:p>
+        </p:txBody>
+      </p:sp>
     </p:spTree>
   </p:cSld>
   <p:clrMapOvr>
@@ -15080,6 +15440,46 @@
           </a:prstGeom>
         </p:spPr>
       </p:pic>
+      <p:sp>
+        <p:nvSpPr>
+          <p:cNvPr id="30" name="ZoneTexte 29">
+            <a:extLst>
+              <a:ext uri="{FF2B5EF4-FFF2-40B4-BE49-F238E27FC236}">
+                <a16:creationId xmlns:a16="http://schemas.microsoft.com/office/drawing/2014/main" id="{DCD05B33-1B91-9EAC-4E90-92650A84D8DD}"/>
+              </a:ext>
+            </a:extLst>
+          </p:cNvPr>
+          <p:cNvSpPr txBox="1"/>
+          <p:nvPr/>
+        </p:nvSpPr>
+        <p:spPr>
+          <a:xfrm>
+            <a:off x="0" y="4864100"/>
+            <a:ext cx="9144000" cy="230832"/>
+          </a:xfrm>
+          <a:prstGeom prst="rect">
+            <a:avLst/>
+          </a:prstGeom>
+          <a:noFill/>
+        </p:spPr>
+        <p:txBody>
+          <a:bodyPr vert="horz" rtlCol="0">
+            <a:spAutoFit/>
+          </a:bodyPr>
+          <a:lstStyle/>
+          <a:p>
+            <a:pPr algn="ctr"/>
+            <a:r>
+              <a:rPr lang="fr-FR" sz="900">
+                <a:solidFill>
+                  <a:srgbClr val="B4B4B4"/>
+                </a:solidFill>
+              </a:rPr>
+              <a:t>(c) titi_23 - mediateur-numerique.github.io - Reproduction interdite sans autorisation</a:t>
+            </a:r>
+          </a:p>
+        </p:txBody>
+      </p:sp>
     </p:spTree>
   </p:cSld>
   <p:clrMapOvr>
@@ -17270,6 +17670,46 @@
           </a:p>
         </p:txBody>
       </p:sp>
+      <p:sp>
+        <p:nvSpPr>
+          <p:cNvPr id="54" name="ZoneTexte 53">
+            <a:extLst>
+              <a:ext uri="{FF2B5EF4-FFF2-40B4-BE49-F238E27FC236}">
+                <a16:creationId xmlns:a16="http://schemas.microsoft.com/office/drawing/2014/main" id="{7FE6403A-0063-7B1E-6672-641ACA21F8F2}"/>
+              </a:ext>
+            </a:extLst>
+          </p:cNvPr>
+          <p:cNvSpPr txBox="1"/>
+          <p:nvPr/>
+        </p:nvSpPr>
+        <p:spPr>
+          <a:xfrm>
+            <a:off x="0" y="4864100"/>
+            <a:ext cx="9144000" cy="230832"/>
+          </a:xfrm>
+          <a:prstGeom prst="rect">
+            <a:avLst/>
+          </a:prstGeom>
+          <a:noFill/>
+        </p:spPr>
+        <p:txBody>
+          <a:bodyPr vert="horz" rtlCol="0">
+            <a:spAutoFit/>
+          </a:bodyPr>
+          <a:lstStyle/>
+          <a:p>
+            <a:pPr algn="ctr"/>
+            <a:r>
+              <a:rPr lang="fr-FR" sz="900">
+                <a:solidFill>
+                  <a:srgbClr val="B4B4B4"/>
+                </a:solidFill>
+              </a:rPr>
+              <a:t>(c) titi_23 - mediateur-numerique.github.io - Reproduction interdite sans autorisation</a:t>
+            </a:r>
+          </a:p>
+        </p:txBody>
+      </p:sp>
     </p:spTree>
   </p:cSld>
   <p:clrMapOvr>
@@ -18407,6 +18847,46 @@
           </a:p>
         </p:txBody>
       </p:sp>
+      <p:sp>
+        <p:nvSpPr>
+          <p:cNvPr id="35" name="ZoneTexte 34">
+            <a:extLst>
+              <a:ext uri="{FF2B5EF4-FFF2-40B4-BE49-F238E27FC236}">
+                <a16:creationId xmlns:a16="http://schemas.microsoft.com/office/drawing/2014/main" id="{D3BF2ED4-861E-C713-8AAE-EBFA6F485CBF}"/>
+              </a:ext>
+            </a:extLst>
+          </p:cNvPr>
+          <p:cNvSpPr txBox="1"/>
+          <p:nvPr/>
+        </p:nvSpPr>
+        <p:spPr>
+          <a:xfrm>
+            <a:off x="0" y="4864100"/>
+            <a:ext cx="9144000" cy="230832"/>
+          </a:xfrm>
+          <a:prstGeom prst="rect">
+            <a:avLst/>
+          </a:prstGeom>
+          <a:noFill/>
+        </p:spPr>
+        <p:txBody>
+          <a:bodyPr vert="horz" rtlCol="0">
+            <a:spAutoFit/>
+          </a:bodyPr>
+          <a:lstStyle/>
+          <a:p>
+            <a:pPr algn="ctr"/>
+            <a:r>
+              <a:rPr lang="fr-FR" sz="900">
+                <a:solidFill>
+                  <a:srgbClr val="B4B4B4"/>
+                </a:solidFill>
+              </a:rPr>
+              <a:t>(c) titi_23 - mediateur-numerique.github.io - Reproduction interdite sans autorisation</a:t>
+            </a:r>
+          </a:p>
+        </p:txBody>
+      </p:sp>
     </p:spTree>
   </p:cSld>
   <p:clrMapOvr>
@@ -19581,6 +20061,46 @@
           </a:p>
         </p:txBody>
       </p:sp>
+      <p:sp>
+        <p:nvSpPr>
+          <p:cNvPr id="33" name="ZoneTexte 32">
+            <a:extLst>
+              <a:ext uri="{FF2B5EF4-FFF2-40B4-BE49-F238E27FC236}">
+                <a16:creationId xmlns:a16="http://schemas.microsoft.com/office/drawing/2014/main" id="{E49C97DE-13A4-C7A5-E409-A237C9C277F3}"/>
+              </a:ext>
+            </a:extLst>
+          </p:cNvPr>
+          <p:cNvSpPr txBox="1"/>
+          <p:nvPr/>
+        </p:nvSpPr>
+        <p:spPr>
+          <a:xfrm>
+            <a:off x="0" y="4864100"/>
+            <a:ext cx="9144000" cy="230832"/>
+          </a:xfrm>
+          <a:prstGeom prst="rect">
+            <a:avLst/>
+          </a:prstGeom>
+          <a:noFill/>
+        </p:spPr>
+        <p:txBody>
+          <a:bodyPr vert="horz" rtlCol="0">
+            <a:spAutoFit/>
+          </a:bodyPr>
+          <a:lstStyle/>
+          <a:p>
+            <a:pPr algn="ctr"/>
+            <a:r>
+              <a:rPr lang="fr-FR" sz="900">
+                <a:solidFill>
+                  <a:srgbClr val="B4B4B4"/>
+                </a:solidFill>
+              </a:rPr>
+              <a:t>(c) titi_23 - mediateur-numerique.github.io - Reproduction interdite sans autorisation</a:t>
+            </a:r>
+          </a:p>
+        </p:txBody>
+      </p:sp>
     </p:spTree>
   </p:cSld>
   <p:clrMapOvr>
@@ -20558,6 +21078,46 @@
           </a:p>
         </p:txBody>
       </p:sp>
+      <p:sp>
+        <p:nvSpPr>
+          <p:cNvPr id="26" name="ZoneTexte 25">
+            <a:extLst>
+              <a:ext uri="{FF2B5EF4-FFF2-40B4-BE49-F238E27FC236}">
+                <a16:creationId xmlns:a16="http://schemas.microsoft.com/office/drawing/2014/main" id="{A5B1FAAF-D1D9-144E-CD93-636B53CA1BC8}"/>
+              </a:ext>
+            </a:extLst>
+          </p:cNvPr>
+          <p:cNvSpPr txBox="1"/>
+          <p:nvPr/>
+        </p:nvSpPr>
+        <p:spPr>
+          <a:xfrm>
+            <a:off x="0" y="4864100"/>
+            <a:ext cx="9144000" cy="230832"/>
+          </a:xfrm>
+          <a:prstGeom prst="rect">
+            <a:avLst/>
+          </a:prstGeom>
+          <a:noFill/>
+        </p:spPr>
+        <p:txBody>
+          <a:bodyPr vert="horz" rtlCol="0">
+            <a:spAutoFit/>
+          </a:bodyPr>
+          <a:lstStyle/>
+          <a:p>
+            <a:pPr algn="ctr"/>
+            <a:r>
+              <a:rPr lang="fr-FR" sz="900">
+                <a:solidFill>
+                  <a:srgbClr val="B4B4B4"/>
+                </a:solidFill>
+              </a:rPr>
+              <a:t>(c) titi_23 - mediateur-numerique.github.io - Reproduction interdite sans autorisation</a:t>
+            </a:r>
+          </a:p>
+        </p:txBody>
+      </p:sp>
     </p:spTree>
   </p:cSld>
   <p:clrMapOvr>
@@ -21982,6 +22542,46 @@
           </a:p>
         </p:txBody>
       </p:sp>
+      <p:sp>
+        <p:nvSpPr>
+          <p:cNvPr id="39" name="ZoneTexte 38">
+            <a:extLst>
+              <a:ext uri="{FF2B5EF4-FFF2-40B4-BE49-F238E27FC236}">
+                <a16:creationId xmlns:a16="http://schemas.microsoft.com/office/drawing/2014/main" id="{264DD194-6BB8-634D-2F64-9CF2B86CA451}"/>
+              </a:ext>
+            </a:extLst>
+          </p:cNvPr>
+          <p:cNvSpPr txBox="1"/>
+          <p:nvPr/>
+        </p:nvSpPr>
+        <p:spPr>
+          <a:xfrm>
+            <a:off x="0" y="4864100"/>
+            <a:ext cx="9144000" cy="230832"/>
+          </a:xfrm>
+          <a:prstGeom prst="rect">
+            <a:avLst/>
+          </a:prstGeom>
+          <a:noFill/>
+        </p:spPr>
+        <p:txBody>
+          <a:bodyPr vert="horz" rtlCol="0">
+            <a:spAutoFit/>
+          </a:bodyPr>
+          <a:lstStyle/>
+          <a:p>
+            <a:pPr algn="ctr"/>
+            <a:r>
+              <a:rPr lang="fr-FR" sz="900">
+                <a:solidFill>
+                  <a:srgbClr val="B4B4B4"/>
+                </a:solidFill>
+              </a:rPr>
+              <a:t>(c) titi_23 - mediateur-numerique.github.io - Reproduction interdite sans autorisation</a:t>
+            </a:r>
+          </a:p>
+        </p:txBody>
+      </p:sp>
     </p:spTree>
   </p:cSld>
   <p:clrMapOvr>
@@ -23417,6 +24017,46 @@
           </a:p>
         </p:txBody>
       </p:sp>
+      <p:sp>
+        <p:nvSpPr>
+          <p:cNvPr id="39" name="ZoneTexte 38">
+            <a:extLst>
+              <a:ext uri="{FF2B5EF4-FFF2-40B4-BE49-F238E27FC236}">
+                <a16:creationId xmlns:a16="http://schemas.microsoft.com/office/drawing/2014/main" id="{E8DC534E-34DB-8084-9844-8B78EF212CAD}"/>
+              </a:ext>
+            </a:extLst>
+          </p:cNvPr>
+          <p:cNvSpPr txBox="1"/>
+          <p:nvPr/>
+        </p:nvSpPr>
+        <p:spPr>
+          <a:xfrm>
+            <a:off x="0" y="4864100"/>
+            <a:ext cx="9144000" cy="230832"/>
+          </a:xfrm>
+          <a:prstGeom prst="rect">
+            <a:avLst/>
+          </a:prstGeom>
+          <a:noFill/>
+        </p:spPr>
+        <p:txBody>
+          <a:bodyPr vert="horz" rtlCol="0">
+            <a:spAutoFit/>
+          </a:bodyPr>
+          <a:lstStyle/>
+          <a:p>
+            <a:pPr algn="ctr"/>
+            <a:r>
+              <a:rPr lang="fr-FR" sz="900">
+                <a:solidFill>
+                  <a:srgbClr val="B4B4B4"/>
+                </a:solidFill>
+              </a:rPr>
+              <a:t>(c) titi_23 - mediateur-numerique.github.io - Reproduction interdite sans autorisation</a:t>
+            </a:r>
+          </a:p>
+        </p:txBody>
+      </p:sp>
     </p:spTree>
   </p:cSld>
   <p:clrMapOvr>
@@ -24897,6 +25537,46 @@
           </a:p>
         </p:txBody>
       </p:sp>
+      <p:sp>
+        <p:nvSpPr>
+          <p:cNvPr id="45" name="ZoneTexte 44">
+            <a:extLst>
+              <a:ext uri="{FF2B5EF4-FFF2-40B4-BE49-F238E27FC236}">
+                <a16:creationId xmlns:a16="http://schemas.microsoft.com/office/drawing/2014/main" id="{2438F7DB-807B-F536-4E74-10BD56BCBFBF}"/>
+              </a:ext>
+            </a:extLst>
+          </p:cNvPr>
+          <p:cNvSpPr txBox="1"/>
+          <p:nvPr/>
+        </p:nvSpPr>
+        <p:spPr>
+          <a:xfrm>
+            <a:off x="0" y="4864100"/>
+            <a:ext cx="9144000" cy="230832"/>
+          </a:xfrm>
+          <a:prstGeom prst="rect">
+            <a:avLst/>
+          </a:prstGeom>
+          <a:noFill/>
+        </p:spPr>
+        <p:txBody>
+          <a:bodyPr vert="horz" rtlCol="0">
+            <a:spAutoFit/>
+          </a:bodyPr>
+          <a:lstStyle/>
+          <a:p>
+            <a:pPr algn="ctr"/>
+            <a:r>
+              <a:rPr lang="fr-FR" sz="900">
+                <a:solidFill>
+                  <a:srgbClr val="B4B4B4"/>
+                </a:solidFill>
+              </a:rPr>
+              <a:t>(c) titi_23 - mediateur-numerique.github.io - Reproduction interdite sans autorisation</a:t>
+            </a:r>
+          </a:p>
+        </p:txBody>
+      </p:sp>
     </p:spTree>
   </p:cSld>
   <p:clrMapOvr>
@@ -26213,6 +26893,46 @@
               <a:t>Yggdrasil · Médiation numérique</a:t>
             </a:r>
             <a:endParaRPr lang="en-US" sz="900" dirty="0"/>
+          </a:p>
+        </p:txBody>
+      </p:sp>
+      <p:sp>
+        <p:nvSpPr>
+          <p:cNvPr id="35" name="ZoneTexte 34">
+            <a:extLst>
+              <a:ext uri="{FF2B5EF4-FFF2-40B4-BE49-F238E27FC236}">
+                <a16:creationId xmlns:a16="http://schemas.microsoft.com/office/drawing/2014/main" id="{EF781119-CCEA-2D29-2002-7A1FF1E7FFC3}"/>
+              </a:ext>
+            </a:extLst>
+          </p:cNvPr>
+          <p:cNvSpPr txBox="1"/>
+          <p:nvPr/>
+        </p:nvSpPr>
+        <p:spPr>
+          <a:xfrm>
+            <a:off x="0" y="4864100"/>
+            <a:ext cx="9144000" cy="230832"/>
+          </a:xfrm>
+          <a:prstGeom prst="rect">
+            <a:avLst/>
+          </a:prstGeom>
+          <a:noFill/>
+        </p:spPr>
+        <p:txBody>
+          <a:bodyPr vert="horz" rtlCol="0">
+            <a:spAutoFit/>
+          </a:bodyPr>
+          <a:lstStyle/>
+          <a:p>
+            <a:pPr algn="ctr"/>
+            <a:r>
+              <a:rPr lang="fr-FR" sz="900">
+                <a:solidFill>
+                  <a:srgbClr val="B4B4B4"/>
+                </a:solidFill>
+              </a:rPr>
+              <a:t>(c) titi_23 - mediateur-numerique.github.io - Reproduction interdite sans autorisation</a:t>
+            </a:r>
           </a:p>
         </p:txBody>
       </p:sp>
